--- a/apps/resources/bundled_files/4-klass-kop-orunduu-kobeytuu-boluu-sabak.pptx
+++ b/apps/resources/bundled_files/4-klass-kop-orunduu-kobeytuu-boluu-sabak.pptx
@@ -5196,7 +5196,7 @@
                 </a:solidFill>
                 <a:latin typeface="PT Sans"/>
               </a:rPr>
-              <a:t>4-класс · Математика</a:t>
+              <a:t/>
             </a:r>
           </a:p>
         </p:txBody>
@@ -5688,7 +5688,7 @@
                 </a:solidFill>
                 <a:latin typeface="PT Sans"/>
               </a:rPr>
-              <a:t>4-класс ›</a:t>
+              <a:t/>
             </a:r>
           </a:p>
           <a:p>
@@ -6637,7 +6637,7 @@
                 </a:solidFill>
                 <a:latin typeface="PT Sans"/>
               </a:rPr>
-              <a:t>4-класс ›</a:t>
+              <a:t/>
             </a:r>
           </a:p>
           <a:p>
@@ -19223,7 +19223,7 @@
                 </a:solidFill>
                 <a:latin typeface="PT Sans"/>
               </a:rPr>
-              <a:t>4-класс ›</a:t>
+              <a:t/>
             </a:r>
           </a:p>
           <a:p>
@@ -22522,7 +22522,7 @@
                 </a:solidFill>
                 <a:latin typeface="PT Sans"/>
               </a:rPr>
-              <a:t>4-класс ›</a:t>
+              <a:t/>
             </a:r>
           </a:p>
           <a:p>
@@ -24105,7 +24105,7 @@
                 </a:solidFill>
                 <a:latin typeface="PT Sans"/>
               </a:rPr>
-              <a:t>4-класс ›</a:t>
+              <a:t/>
             </a:r>
           </a:p>
           <a:p>
@@ -24895,7 +24895,7 @@
                 </a:solidFill>
                 <a:latin typeface="PT Sans"/>
               </a:rPr>
-              <a:t>4-класс ›</a:t>
+              <a:t/>
             </a:r>
           </a:p>
           <a:p>
@@ -25802,7 +25802,7 @@
                 </a:solidFill>
                 <a:latin typeface="PT Sans"/>
               </a:rPr>
-              <a:t>4-класс ›</a:t>
+              <a:t/>
             </a:r>
           </a:p>
           <a:p>
@@ -27468,7 +27468,7 @@
                 </a:solidFill>
                 <a:latin typeface="PT Sans"/>
               </a:rPr>
-              <a:t>4-класс ›</a:t>
+              <a:t/>
             </a:r>
           </a:p>
           <a:p>
@@ -28552,7 +28552,7 @@
                 </a:solidFill>
                 <a:latin typeface="PT Sans"/>
               </a:rPr>
-              <a:t>4-класс ›</a:t>
+              <a:t/>
             </a:r>
           </a:p>
           <a:p>
@@ -30082,7 +30082,7 @@
                 </a:solidFill>
                 <a:latin typeface="PT Sans"/>
               </a:rPr>
-              <a:t>4-класс ›</a:t>
+              <a:t/>
             </a:r>
           </a:p>
           <a:p>
@@ -32038,7 +32038,7 @@
                 </a:solidFill>
                 <a:latin typeface="PT Sans"/>
               </a:rPr>
-              <a:t>4-класс ›</a:t>
+              <a:t/>
             </a:r>
           </a:p>
           <a:p>
@@ -33315,7 +33315,7 @@
                 </a:solidFill>
                 <a:latin typeface="PT Sans"/>
               </a:rPr>
-              <a:t>4-класс ›</a:t>
+              <a:t/>
             </a:r>
           </a:p>
           <a:p>
@@ -34743,7 +34743,7 @@
                 </a:solidFill>
                 <a:latin typeface="PT Sans"/>
               </a:rPr>
-              <a:t>4-класс ›</a:t>
+              <a:t/>
             </a:r>
           </a:p>
           <a:p>
@@ -36199,7 +36199,7 @@
                 </a:solidFill>
                 <a:latin typeface="PT Sans"/>
               </a:rPr>
-              <a:t>4-класс ›</a:t>
+              <a:t/>
             </a:r>
           </a:p>
           <a:p>
@@ -37495,7 +37495,7 @@
                 </a:solidFill>
                 <a:latin typeface="PT Sans"/>
               </a:rPr>
-              <a:t>4-класс ›</a:t>
+              <a:t/>
             </a:r>
           </a:p>
           <a:p>
@@ -38295,7 +38295,7 @@
                 </a:solidFill>
                 <a:latin typeface="PT Sans"/>
               </a:rPr>
-              <a:t>4-класс ›</a:t>
+              <a:t/>
             </a:r>
           </a:p>
           <a:p>
@@ -39136,7 +39136,7 @@
                 </a:solidFill>
                 <a:latin typeface="PT Sans"/>
               </a:rPr>
-              <a:t>4-класс ›</a:t>
+              <a:t/>
             </a:r>
           </a:p>
           <a:p>
@@ -40085,7 +40085,7 @@
                 </a:solidFill>
                 <a:latin typeface="PT Sans"/>
               </a:rPr>
-              <a:t>4-класс ›</a:t>
+              <a:t/>
             </a:r>
           </a:p>
           <a:p>
@@ -41539,7 +41539,7 @@
                 </a:solidFill>
                 <a:latin typeface="PT Sans"/>
               </a:rPr>
-              <a:t>4-класс ›</a:t>
+              <a:t/>
             </a:r>
           </a:p>
           <a:p>
@@ -42285,7 +42285,7 @@
                 </a:solidFill>
                 <a:latin typeface="PT Sans"/>
               </a:rPr>
-              <a:t>4-класс ›</a:t>
+              <a:t/>
             </a:r>
           </a:p>
           <a:p>
@@ -43093,7 +43093,7 @@
                 </a:solidFill>
                 <a:latin typeface="PT Sans"/>
               </a:rPr>
-              <a:t>4-класс ›</a:t>
+              <a:t/>
             </a:r>
           </a:p>
           <a:p>
@@ -44284,7 +44284,7 @@
                 </a:solidFill>
                 <a:latin typeface="PT Sans"/>
               </a:rPr>
-              <a:t>4-класс ›</a:t>
+              <a:t/>
             </a:r>
           </a:p>
           <a:p>
@@ -45463,7 +45463,7 @@
                 </a:solidFill>
                 <a:latin typeface="PT Sans"/>
               </a:rPr>
-              <a:t>4-класс ›</a:t>
+              <a:t/>
             </a:r>
           </a:p>
           <a:p>
@@ -45644,7 +45644,7 @@
                 </a:solidFill>
                 <a:latin typeface="PT Sans"/>
               </a:rPr>
-              <a:t>2-класс</a:t>
+              <a:t/>
             </a:r>
           </a:p>
         </p:txBody>
@@ -45824,7 +45824,7 @@
                 </a:solidFill>
                 <a:latin typeface="PT Sans"/>
               </a:rPr>
-              <a:t>3-класс</a:t>
+              <a:t/>
             </a:r>
           </a:p>
         </p:txBody>
@@ -46004,7 +46004,7 @@
                 </a:solidFill>
                 <a:latin typeface="PT Sans"/>
               </a:rPr>
-              <a:t>4-класс</a:t>
+              <a:t/>
             </a:r>
           </a:p>
         </p:txBody>
@@ -46240,7 +46240,7 @@
                 </a:solidFill>
                 <a:latin typeface="PT Sans"/>
               </a:rPr>
-              <a:t>5-класс</a:t>
+              <a:t/>
             </a:r>
           </a:p>
         </p:txBody>
@@ -46660,7 +46660,7 @@
                 </a:solidFill>
                 <a:latin typeface="PT Sans"/>
               </a:rPr>
-              <a:t>4-класс ›</a:t>
+              <a:t/>
             </a:r>
           </a:p>
           <a:p>
@@ -47808,7 +47808,7 @@
                 </a:solidFill>
                 <a:latin typeface="PT Sans"/>
               </a:rPr>
-              <a:t>4-класс ›</a:t>
+              <a:t/>
             </a:r>
           </a:p>
           <a:p>

--- a/apps/resources/bundled_files/4-klass-kop-orunduu-kobeytuu-boluu-sabak.pptx
+++ b/apps/resources/bundled_files/4-klass-kop-orunduu-kobeytuu-boluu-sabak.pptx
@@ -1582,7 +1582,7 @@
           <a:lstStyle/>
           <a:p>
             <a:r>
-              <a:t>Ой жүгүртүү маданияты (Wenxi Lee, 2.6).</a:t>
+              <a:t>Ой жүгүртүү маданияты (Wenxi Lee, 2,6).</a:t>
             </a:r>
           </a:p>
         </p:txBody>
